--- a/decks/englang-opinion/englang-opinion_ch5_opinion-article.pptx
+++ b/decks/englang-opinion/englang-opinion_ch5_opinion-article.pptx
@@ -124,29 +124,29 @@
   <p:extLst>
     <p:ext uri="{521415D9-36F7-43E2-AB2F-B90AF26B5E84}">
       <p14:sectionLst xmlns:p14="http://schemas.microsoft.com/office/powerpoint/2010/main">
-        <p14:section name="Opening" id="{04649b80-dd63-4624-2939-cebef737c36c}">
+        <p14:section name="Opening" id="{a2ab7bb1-68b2-dd90-374f-3cb4cf57ce34}">
           <p14:sldIdLst>
             <p14:sldId id="256"/>
           </p14:sldIdLst>
         </p14:section>
-        <p14:section name="Gate" id="{e4d9512e-53e3-315c-6781-5f1994f4a4a5}">
+        <p14:section name="Gate" id="{7a27333d-7e00-c4fa-636c-4cbc66bc0a96}">
           <p14:sldIdLst>
             <p14:sldId id="257"/>
             <p14:sldId id="258"/>
           </p14:sldIdLst>
         </p14:section>
-        <p14:section name="Pre-teach" id="{28d7777b-7c74-0537-10e6-aeba6e9dcc49}">
+        <p14:section name="Pre-teach" id="{e5236576-7f80-d325-fe3d-bcae09777272}">
           <p14:sldIdLst>
             <p14:sldId id="259"/>
           </p14:sldIdLst>
         </p14:section>
-        <p14:section name="Read-along" id="{2a51c9e6-943d-d146-b40a-90cbe2b119cf}">
+        <p14:section name="Read-along" id="{b19f73b6-5480-654c-cdf8-11b11a4635ac}">
           <p14:sldIdLst>
             <p14:sldId id="260"/>
             <p14:sldId id="261"/>
           </p14:sldIdLst>
         </p14:section>
-        <p14:section name="Teach" id="{8b16ed6b-133c-7665-2ebd-fa91891d321a}">
+        <p14:section name="Teach" id="{ffd04d8f-dc8d-ebeb-eff7-5625e7309c07}">
           <p14:sldIdLst>
             <p14:sldId id="262"/>
             <p14:sldId id="263"/>
@@ -154,7 +154,7 @@
             <p14:sldId id="265"/>
           </p14:sldIdLst>
         </p14:section>
-        <p14:section name="Routes" id="{e1a2cdad-6427-69e5-4561-90d1973c017b}">
+        <p14:section name="Routes" id="{20bc7e0b-8d6c-c10d-8a5a-00c46c608689}">
           <p14:sldIdLst>
             <p14:sldId id="266"/>
             <p14:sldId id="267"/>
@@ -162,12 +162,12 @@
             <p14:sldId id="269"/>
           </p14:sldIdLst>
         </p14:section>
-        <p14:section name="Close" id="{3b7b8a19-92c2-9a55-f85b-00869b2cb775}">
+        <p14:section name="Close" id="{62197d67-469c-0409-c690-e8bcfbefd4c4}">
           <p14:sldIdLst>
             <p14:sldId id="270"/>
           </p14:sldIdLst>
         </p14:section>
-        <p14:section name="Answers" id="{b4ef11a1-e946-94d7-d93b-7e44208969bc}">
+        <p14:section name="Answers" id="{16531dcc-9054-a70b-d440-c1e069eb4d70}">
           <p14:sldIdLst>
             <p14:sldId id="271"/>
             <p14:sldId id="272"/>
@@ -1140,7 +1140,7 @@
               <a:rPr lang="en-US" dirty="0"/>
               <a:t>Exit ticket — individual, silent, on a slip or mini-whiteboard. Recall before help: no notes, no lanes, no hints. Collect before pupils leave.
 Question: What must the opening of an opinion article include?
-Answer: D   A hook, the topic and the writer’s opinion. The opening hooks the reader, outlines the topic and outlines the writer’s opinion.
+Answer: A   A hook, the topic and the writer’s opinion. The opening hooks the reader, outlines the topic and outlines the writer’s opinion.
 Source of this question: gate item 1 re-asked (options rotated) — this chapter has no third quick-check module.
 The ebook also holds task 3, "Writing practice: the opening of an opinion article", for homework or the next lesson's do now.
 Sort the slips: correct → ready to move on; incorrect → start next lesson in the pre-teach group, with the read-along and the Support lane. Same destination next time.</a:t>
@@ -1414,7 +1414,7 @@
             <a:r>
               <a:rPr lang="en-US" dirty="0"/>
               <a:t>Answers — exit ticket: Exit ticket. Reveal the answer; pupils mark their own work in a different colour, then read the "why" together. Same destination for every lane, so one answer serves the whole class.
-Answer: D   A hook, the topic and the writer’s opinion
+Answer: A   A hook, the topic and the writer’s opinion
 Why: The opening hooks the reader, outlines the topic and outlines the writer’s opinion.
 Ask a Support pupil to explain one step, and a Stretch pupil to share their extension.</a:t>
             </a:r>
@@ -1505,7 +1505,7 @@
             <a:r>
               <a:rPr lang="en-US" dirty="0"/>
               <a:t>Do now — retrieval. Silent, no notes, no help: recall comes before any support. Give about four minutes.
-1. What must the opening of an opinion article include?  →  A   A hook, the topic and the writer’s opinion
+1. What must the opening of an opinion article include?  →  B   A hook, the topic and the writer’s opinion
 2. The ___ is the opposite view, which you raise so that you can answer it.  →  counter-argument
 3. In ‘Let Them Sleep’, what kind of evidence is “Last term I kept a sleep diary for a science project”?  →  A   Personal evidence
 Circulate: who gets 3/3 (Stretch route), 2/3 (Core), 0–1 (Support)? Use this to route pupils later in the lesson.</a:t>
@@ -1597,7 +1597,7 @@
             <a:r>
               <a:rPr lang="en-US" dirty="0"/>
               <a:t>Answers — pupils mark their own in a different colour, then hands up for 3/3, 2/3, 1/3.
-1. A   A hook, the topic and the writer’s opinion. The opening hooks the reader, outlines the topic and outlines the writer’s opinion.
+1. B   A hook, the topic and the writer’s opinion. The opening hooks the reader, outlines the topic and outlines the writer’s opinion.
 2. counter-argument. A counter-argument gives the other side so that you can answer it and strengthen your own case.
 3. A   Personal evidence. The writer’s own sleep diary is personal evidence; the nurse’s explanation later is the expert evidence.
 Say the route each score points to: 3/3 Stretch, 2/3 Core, 0–1 Support. Pupils may choose to move up.</a:t>
@@ -8698,7 +8698,7 @@
                 <a:ea typeface="Calibri" pitchFamily="34" charset="-122"/>
                 <a:cs typeface="Calibri" pitchFamily="34" charset="-120"/>
               </a:rPr>
-              <a:t>A summary of the whole plot</a:t>
+              <a:t>A hook, the topic and the writer’s opinion</a:t>
             </a:r>
             <a:endParaRPr lang="en-US" sz="2400" dirty="0"/>
           </a:p>
@@ -8735,7 +8735,7 @@
                 <a:ea typeface="Calibri" pitchFamily="34" charset="-122"/>
                 <a:cs typeface="Calibri" pitchFamily="34" charset="-120"/>
               </a:rPr>
-              <a:t>A star rating out of five</a:t>
+              <a:t>A list of facts with no opinion</a:t>
             </a:r>
             <a:endParaRPr lang="en-US" sz="2400" dirty="0"/>
           </a:p>
@@ -8772,7 +8772,7 @@
                 <a:ea typeface="Calibri" pitchFamily="34" charset="-122"/>
                 <a:cs typeface="Calibri" pitchFamily="34" charset="-120"/>
               </a:rPr>
-              <a:t>A list of facts with no opinion</a:t>
+              <a:t>A summary of the whole plot</a:t>
             </a:r>
             <a:endParaRPr lang="en-US" sz="2400" dirty="0"/>
           </a:p>
@@ -8809,7 +8809,7 @@
                 <a:ea typeface="Calibri" pitchFamily="34" charset="-122"/>
                 <a:cs typeface="Calibri" pitchFamily="34" charset="-120"/>
               </a:rPr>
-              <a:t>A hook, the topic and the writer’s opinion</a:t>
+              <a:t>A star rating out of five</a:t>
             </a:r>
             <a:endParaRPr lang="en-US" sz="2400" dirty="0"/>
           </a:p>
@@ -10539,7 +10539,7 @@
                 <a:ea typeface="Cambria" pitchFamily="34" charset="-122"/>
                 <a:cs typeface="Cambria" pitchFamily="34" charset="-120"/>
               </a:rPr>
-              <a:t>D   A hook, the topic and the writer’s opinion</a:t>
+              <a:t>A   A hook, the topic and the writer’s opinion</a:t>
             </a:r>
             <a:endParaRPr lang="en-US" sz="1800" dirty="0"/>
           </a:p>
@@ -11073,7 +11073,7 @@
                 <a:ea typeface="Calibri" pitchFamily="34" charset="-122"/>
                 <a:cs typeface="Calibri" pitchFamily="34" charset="-120"/>
               </a:rPr>
-              <a:t>A hook, the topic and the writer’s opinion</a:t>
+              <a:t>A star rating out of five</a:t>
             </a:r>
             <a:endParaRPr lang="en-US" sz="2000" dirty="0"/>
           </a:p>
@@ -11110,7 +11110,7 @@
                 <a:ea typeface="Calibri" pitchFamily="34" charset="-122"/>
                 <a:cs typeface="Calibri" pitchFamily="34" charset="-120"/>
               </a:rPr>
-              <a:t>A summary of the whole plot</a:t>
+              <a:t>A hook, the topic and the writer’s opinion</a:t>
             </a:r>
             <a:endParaRPr lang="en-US" sz="2000" dirty="0"/>
           </a:p>
@@ -11147,7 +11147,7 @@
                 <a:ea typeface="Calibri" pitchFamily="34" charset="-122"/>
                 <a:cs typeface="Calibri" pitchFamily="34" charset="-120"/>
               </a:rPr>
-              <a:t>A star rating out of five</a:t>
+              <a:t>A list of facts with no opinion</a:t>
             </a:r>
             <a:endParaRPr lang="en-US" sz="2000" dirty="0"/>
           </a:p>
@@ -11184,7 +11184,7 @@
                 <a:ea typeface="Calibri" pitchFamily="34" charset="-122"/>
                 <a:cs typeface="Calibri" pitchFamily="34" charset="-120"/>
               </a:rPr>
-              <a:t>A list of facts with no opinion</a:t>
+              <a:t>A summary of the whole plot</a:t>
             </a:r>
             <a:endParaRPr lang="en-US" sz="2000" dirty="0"/>
           </a:p>
@@ -11623,7 +11623,7 @@
                 <a:ea typeface="Calibri" pitchFamily="34" charset="-122"/>
                 <a:cs typeface="Calibri" pitchFamily="34" charset="-120"/>
               </a:rPr>
-              <a:t>Expert evidence</a:t>
+              <a:t>A headline</a:t>
             </a:r>
             <a:endParaRPr lang="en-US" sz="2200" dirty="0"/>
           </a:p>
@@ -11660,7 +11660,7 @@
                 <a:ea typeface="Calibri" pitchFamily="34" charset="-122"/>
                 <a:cs typeface="Calibri" pitchFamily="34" charset="-120"/>
               </a:rPr>
-              <a:t>A counter-argument</a:t>
+              <a:t>Expert evidence</a:t>
             </a:r>
             <a:endParaRPr lang="en-US" sz="2200" dirty="0"/>
           </a:p>
@@ -11697,7 +11697,7 @@
                 <a:ea typeface="Calibri" pitchFamily="34" charset="-122"/>
                 <a:cs typeface="Calibri" pitchFamily="34" charset="-120"/>
               </a:rPr>
-              <a:t>A headline</a:t>
+              <a:t>A counter-argument</a:t>
             </a:r>
             <a:endParaRPr lang="en-US" sz="2200" dirty="0"/>
           </a:p>
@@ -12098,7 +12098,7 @@
                 <a:ea typeface="Calibri" pitchFamily="34" charset="-122"/>
                 <a:cs typeface="Calibri" pitchFamily="34" charset="-120"/>
               </a:rPr>
-              <a:t>A   A hook, the topic and the writer’s opinion</a:t>
+              <a:t>B   A hook, the topic and the writer’s opinion</a:t>
             </a:r>
             <a:endParaRPr lang="en-US" sz="2200" dirty="0"/>
           </a:p>

--- a/decks/englang-opinion/englang-opinion_ch5_opinion-article.pptx
+++ b/decks/englang-opinion/englang-opinion_ch5_opinion-article.pptx
@@ -124,29 +124,29 @@
   <p:extLst>
     <p:ext uri="{521415D9-36F7-43E2-AB2F-B90AF26B5E84}">
       <p14:sectionLst xmlns:p14="http://schemas.microsoft.com/office/powerpoint/2010/main">
-        <p14:section name="Opening" id="{a2ab7bb1-68b2-dd90-374f-3cb4cf57ce34}">
+        <p14:section name="Opening" id="{3e327473-b446-0b5e-8234-9990d9bb678d}">
           <p14:sldIdLst>
             <p14:sldId id="256"/>
           </p14:sldIdLst>
         </p14:section>
-        <p14:section name="Gate" id="{7a27333d-7e00-c4fa-636c-4cbc66bc0a96}">
+        <p14:section name="Gate" id="{907807af-9e6f-c1c8-be9f-c770a372eff8}">
           <p14:sldIdLst>
             <p14:sldId id="257"/>
             <p14:sldId id="258"/>
           </p14:sldIdLst>
         </p14:section>
-        <p14:section name="Pre-teach" id="{e5236576-7f80-d325-fe3d-bcae09777272}">
+        <p14:section name="Pre-teach" id="{77434056-2f18-b49f-0f79-6272ff255207}">
           <p14:sldIdLst>
             <p14:sldId id="259"/>
           </p14:sldIdLst>
         </p14:section>
-        <p14:section name="Read-along" id="{b19f73b6-5480-654c-cdf8-11b11a4635ac}">
+        <p14:section name="Read-along" id="{e06a75e0-6fd0-4393-3d5b-a6f64dc5825a}">
           <p14:sldIdLst>
             <p14:sldId id="260"/>
             <p14:sldId id="261"/>
           </p14:sldIdLst>
         </p14:section>
-        <p14:section name="Teach" id="{ffd04d8f-dc8d-ebeb-eff7-5625e7309c07}">
+        <p14:section name="Teach" id="{84d849e0-60a7-7443-d294-51746cdc8e47}">
           <p14:sldIdLst>
             <p14:sldId id="262"/>
             <p14:sldId id="263"/>
@@ -154,7 +154,7 @@
             <p14:sldId id="265"/>
           </p14:sldIdLst>
         </p14:section>
-        <p14:section name="Routes" id="{20bc7e0b-8d6c-c10d-8a5a-00c46c608689}">
+        <p14:section name="Routes" id="{4b6378e7-0862-50a9-e113-a609f234a2f6}">
           <p14:sldIdLst>
             <p14:sldId id="266"/>
             <p14:sldId id="267"/>
@@ -162,12 +162,12 @@
             <p14:sldId id="269"/>
           </p14:sldIdLst>
         </p14:section>
-        <p14:section name="Close" id="{62197d67-469c-0409-c690-e8bcfbefd4c4}">
+        <p14:section name="Close" id="{05337abe-da6a-e894-2469-a0737aec9627}">
           <p14:sldIdLst>
             <p14:sldId id="270"/>
           </p14:sldIdLst>
         </p14:section>
-        <p14:section name="Answers" id="{16531dcc-9054-a70b-d440-c1e069eb4d70}">
+        <p14:section name="Answers" id="{16653cc5-a5a8-189f-b3e8-a7d260a48cbe}">
           <p14:sldIdLst>
             <p14:sldId id="271"/>
             <p14:sldId id="272"/>
